--- a/Denver/Common-Altitude-2027/decks/01-Owner-and-Venue.pptx
+++ b/Denver/Common-Altitude-2027/decks/01-Owner-and-Venue.pptx
@@ -547,7 +547,7 @@
           <a:p/>
           <a:p>
             <a:r>
-              <a:t>Status: working proposal; site/date/partners/funding/capacities unconfirmed. No external action is authorized by the deck.</a:t>
+              <a:t>Status: working proposal. Site, dates, partners, funding and capacity need confirmation. The deck grants no external-action authority.</a:t>
             </a:r>
           </a:p>
           <a:p>
@@ -637,13 +637,13 @@
           </a:p>
           <a:p>
             <a:r>
-              <a:t>An honest owner-return illustration.</a:t>
+              <a:t>Owner profit-share calculation</a:t>
             </a:r>
           </a:p>
           <a:p/>
           <a:p>
             <a:r>
-              <a:t>Art GMV is seller money. A share of distributable profit produces a much smaller amount.</a:t>
+              <a:t>Sellers keep artwork proceeds. This calculation applies the proposed owner share to event cash after reserves.</a:t>
             </a:r>
           </a:p>
           <a:p/>
@@ -654,7 +654,7 @@
           </a:p>
           <a:p>
             <a:r>
-              <a:t>$48,500 / Initially eligible after illustrative holds</a:t>
+              <a:t>$48,500 / Initial pool after model cash reserves</a:t>
             </a:r>
           </a:p>
           <a:p>
@@ -664,13 +664,13 @@
           </a:p>
           <a:p>
             <a:r>
-              <a:t>$15,750 / Cumulative comparison only if claims hold is fully released</a:t>
+              <a:t>$15,750 / Cumulative comparison after a claim-free reserve release</a:t>
             </a:r>
           </a:p>
           <a:p/>
           <a:p>
             <a:r>
-              <a:t>Status: working proposal; site/date/partners/funding/capacities unconfirmed. No external action is authorized by the deck.</a:t>
+              <a:t>Status: working proposal. Site, dates, partners, funding and capacity need confirmation. The deck grants no external-action authority.</a:t>
             </a:r>
           </a:p>
           <a:p>
@@ -760,19 +760,19 @@
           </a:p>
           <a:p>
             <a:r>
-              <a:t>Serve the rental and leasing strategy.</a:t>
+              <a:t>Rental and office-leasing support</a:t>
             </a:r>
           </a:p>
           <a:p/>
           <a:p>
             <a:r>
-              <a:t>Current published direction is rental housing plus retained office use; confirm the specific phase with the owner.</a:t>
+              <a:t>Published plans describe rentals and retained offices. Confirm the current phase with the owner.</a:t>
             </a:r>
           </a:p>
           <a:p/>
           <a:p>
             <a:r>
-              <a:t>Destination identity / An excellent cultural experience and credible public narrative.</a:t>
+              <a:t>Destination identity / Art programming that complements the completed development.</a:t>
             </a:r>
           </a:p>
           <a:p>
@@ -782,13 +782,13 @@
           </a:p>
           <a:p>
             <a:r>
-              <a:t>Construction protection / No unsupported whole-building access or schedule interference.</a:t>
+              <a:t>Construction protection / Use only areas the owner approves and protect construction schedules.</a:t>
             </a:r>
           </a:p>
           <a:p/>
           <a:p>
             <a:r>
-              <a:t>Status: working proposal; site/date/partners/funding/capacities unconfirmed. No external action is authorized by the deck.</a:t>
+              <a:t>Status: working proposal. Site, dates, partners, funding and capacity need confirmation. The deck grants no external-action authority.</a:t>
             </a:r>
           </a:p>
           <a:p>
@@ -878,13 +878,13 @@
           </a:p>
           <a:p>
             <a:r>
-              <a:t>Fund the evidence. Then fund delivery.</a:t>
+              <a:t>Discovery funding and event finance</a:t>
             </a:r>
           </a:p>
           <a:p/>
           <a:p>
             <a:r>
-              <a:t>Illustrative funding needs, not commitments or an investment offering.</a:t>
+              <a:t>These targets need contracts and usable cash. The deck makes no investment offer.</a:t>
             </a:r>
           </a:p>
           <a:p/>
@@ -906,7 +906,7 @@
           <a:p/>
           <a:p>
             <a:r>
-              <a:t>Status: working proposal; site/date/partners/funding/capacities unconfirmed. No external action is authorized by the deck.</a:t>
+              <a:t>Status: working proposal. Site, dates, partners, funding and capacity need confirmation. The deck grants no external-action authority.</a:t>
             </a:r>
           </a:p>
           <a:p>
@@ -996,19 +996,19 @@
           </a:p>
           <a:p>
             <a:r>
-              <a:t>Build a team that can deliver.</a:t>
+              <a:t>Team roles and missing specialists</a:t>
             </a:r>
           </a:p>
           <a:p/>
           <a:p>
             <a:r>
-              <a:t>Founding artistic, product/program and brand functions are identified; appointments and capacity require agreement.</a:t>
+              <a:t>The proposed founding functions cover art, product/program and brand. Hours and appointments remain open.</a:t>
             </a:r>
           </a:p>
           <a:p/>
           <a:p>
             <a:r>
-              <a:t>Executive producer / Experienced delivery, site and city interfaces; role open.</a:t>
+              <a:t>Executive producer / Delivery, site and agency coordination. The project needs to fill this role.</a:t>
             </a:r>
           </a:p>
           <a:p>
@@ -1024,7 +1024,7 @@
           <a:p/>
           <a:p>
             <a:r>
-              <a:t>Status: working proposal; site/date/partners/funding/capacities unconfirmed. No external action is authorized by the deck.</a:t>
+              <a:t>Status: working proposal. Site, dates, partners, funding and capacity need confirmation. The deck grants no external-action authority.</a:t>
             </a:r>
           </a:p>
           <a:p>
@@ -1114,13 +1114,13 @@
           </a:p>
           <a:p>
             <a:r>
-              <a:t>A good neighbor. A controlled project.</a:t>
+              <a:t>Construction and public-use requirements</a:t>
             </a:r>
           </a:p>
           <a:p/>
           <a:p>
             <a:r>
-              <a:t>The reported construction period overlaps summer 2027. Availability must be established, not assumed.</a:t>
+              <a:t>Reported construction overlaps summer 2027. The owner must confirm whether any suitable area is available.</a:t>
             </a:r>
           </a:p>
           <a:p/>
@@ -1142,7 +1142,7 @@
           <a:p/>
           <a:p>
             <a:r>
-              <a:t>Status: working proposal; site/date/partners/funding/capacities unconfirmed. No external action is authorized by the deck.</a:t>
+              <a:t>Status: working proposal. Site, dates, partners, funding and capacity need confirmation. The deck grants no external-action authority.</a:t>
             </a:r>
           </a:p>
           <a:p>
@@ -1232,13 +1232,13 @@
           </a:p>
           <a:p>
             <a:r>
-              <a:t>Six weeks to a useful decision.</a:t>
+              <a:t>Six-week discovery plan</a:t>
             </a:r>
           </a:p>
           <a:p/>
           <a:p>
             <a:r>
-              <a:t>Proposed discovery structure; no full event commitment is requested at this stage.</a:t>
+              <a:t>The first decision concerns paid feasibility. Event approval follows the results.</a:t>
             </a:r>
           </a:p>
           <a:p/>
@@ -1265,7 +1265,7 @@
           <a:p/>
           <a:p>
             <a:r>
-              <a:t>Status: working proposal; site/date/partners/funding/capacities unconfirmed. No external action is authorized by the deck.</a:t>
+              <a:t>Status: working proposal. Site, dates, partners, funding and capacity need confirmation. The deck grants no external-action authority.</a:t>
             </a:r>
           </a:p>
           <a:p>
@@ -1355,13 +1355,13 @@
           </a:p>
           <a:p>
             <a:r>
-              <a:t>Authorize a bounded investigation.</a:t>
+              <a:t>Discovery decision</a:t>
             </a:r>
           </a:p>
           <a:p/>
           <a:p>
             <a:r>
-              <a:t>Next decision: nominate the owner counterpart, share the site/phasing evidence and agree a funded discovery scope.</a:t>
+              <a:t>The owner would identify a responsible contact, share plans and phasing, and agree a funded discovery scope.</a:t>
             </a:r>
           </a:p>
           <a:p/>
@@ -1383,7 +1383,7 @@
           <a:p/>
           <a:p>
             <a:r>
-              <a:t>Status: working proposal; site/date/partners/funding/capacities unconfirmed. No external action is authorized by the deck.</a:t>
+              <a:t>Status: working proposal. Site, dates, partners, funding and capacity need confirmation. The deck grants no external-action authority.</a:t>
             </a:r>
           </a:p>
           <a:p>
@@ -1473,13 +1473,13 @@
           </a:p>
           <a:p>
             <a:r>
-              <a:t>The evidence and the conditions.</a:t>
+              <a:t>Sources and open conditions</a:t>
             </a:r>
           </a:p>
           <a:p/>
           <a:p>
             <a:r>
-              <a:t>Current proposal, October 24, 2026. Site/date, funding, participants and capacities are unconfirmed.</a:t>
+              <a:t>October 24, 2026. Venue, dates, funding, partners and capacity still need confirmation.</a:t>
             </a:r>
           </a:p>
           <a:p/>
@@ -1500,13 +1500,13 @@
           </a:p>
           <a:p>
             <a:r>
-              <a:t>Original concept graphics; no third-party artwork or partner logos reused.</a:t>
+              <a:t>Original concept graphics. The deck contains no third-party art or partner logos.</a:t>
             </a:r>
           </a:p>
           <a:p/>
           <a:p>
             <a:r>
-              <a:t>Status: working proposal; site/date/partners/funding/capacities unconfirmed. No external action is authorized by the deck.</a:t>
+              <a:t>Status: working proposal. Site, dates, partners, funding and capacity need confirmation. The deck grants no external-action authority.</a:t>
             </a:r>
           </a:p>
           <a:p>
@@ -1596,24 +1596,24 @@
           </a:p>
           <a:p>
             <a:r>
-              <a:t>Give the address a cultural life.</a:t>
+              <a:t>Art at Denver Energy Center</a:t>
             </a:r>
           </a:p>
           <a:p/>
           <a:p>
             <a:r>
-              <a:t>A bounded art activation designed to serve the project and the people who make art.</a:t>
+              <a:t>The proposal combines an art market, commissioned work and free public access within an approved footprint.</a:t>
             </a:r>
           </a:p>
           <a:p/>
           <a:p>
             <a:r>
-              <a:t>A reason to visit / Exceptional work and artist-authored rooms create a compelling destination.</a:t>
-            </a:r>
-          </a:p>
-          <a:p>
-            <a:r>
-              <a:t>A useful market / Collectors meet trusted sellers, with time, context and dependable service.</a:t>
+              <a:t>A reason to visit / Artists and galleries present selected work in individual rooms.</a:t>
+            </a:r>
+          </a:p>
+          <a:p>
+            <a:r>
+              <a:t>A useful market / Buyers get appointments, work records, seller invoices and delivery support.</a:t>
             </a:r>
           </a:p>
           <a:p>
@@ -1624,7 +1624,7 @@
           <a:p/>
           <a:p>
             <a:r>
-              <a:t>Status: working proposal; site/date/partners/funding/capacities unconfirmed. No external action is authorized by the deck.</a:t>
+              <a:t>Status: working proposal. Site, dates, partners, funding and capacity need confirmation. The deck grants no external-action authority.</a:t>
             </a:r>
           </a:p>
           <a:p>
@@ -1714,13 +1714,13 @@
           </a:p>
           <a:p>
             <a:r>
-              <a:t>The ordinary becomes extraordinary.</a:t>
+              <a:t>Art in former offices</a:t>
             </a:r>
           </a:p>
           <a:p/>
           <a:p>
             <a:r>
-              <a:t>An office complex becomes an art fair, exhibition, workshop and place to encounter what is possible.</a:t>
+              <a:t>The proposed fair combines gallery rooms, artist work, workshops and buying appointments.</a:t>
             </a:r>
           </a:p>
           <a:p/>
@@ -1736,13 +1736,13 @@
           </a:p>
           <a:p>
             <a:r>
-              <a:t>Artist authorship and buying confidence lead the experience.</a:t>
+              <a:t>Artists control their work. Sellers supply accurate records and purchase terms.</a:t>
             </a:r>
           </a:p>
           <a:p/>
           <a:p>
             <a:r>
-              <a:t>Status: working proposal; site/date/partners/funding/capacities unconfirmed. No external action is authorized by the deck.</a:t>
+              <a:t>Status: working proposal. Site, dates, partners, funding and capacity need confirmation. The deck grants no external-action authority.</a:t>
             </a:r>
           </a:p>
           <a:p>
@@ -1832,13 +1832,13 @@
           </a:p>
           <a:p>
             <a:r>
-              <a:t>One coherent edition. Room to grow.</a:t>
+              <a:t>Proposed allocation of 60 spaces</a:t>
             </a:r>
           </a:p>
           <a:p/>
           <a:p>
             <a:r>
-              <a:t>60 programmed rooms or equivalent spaces is the proposed core—not a surveyed floor plan.</a:t>
+              <a:t>A site survey must establish where these 60 program functions can fit.</a:t>
             </a:r>
           </a:p>
           <a:p/>
@@ -1865,7 +1865,7 @@
           <a:p/>
           <a:p>
             <a:r>
-              <a:t>Status: working proposal; site/date/partners/funding/capacities unconfirmed. No external action is authorized by the deck.</a:t>
+              <a:t>Status: working proposal. Site, dates, partners, funding and capacity need confirmation. The deck grants no external-action authority.</a:t>
             </a:r>
           </a:p>
           <a:p>
@@ -1955,13 +1955,13 @@
           </a:p>
           <a:p>
             <a:r>
-              <a:t>A week with a clear rhythm.</a:t>
+              <a:t>Two preview days and five public days</a:t>
             </a:r>
           </a:p>
           <a:p/>
           <a:p>
             <a:r>
-              <a:t>Two professional/preview days. Five public art days. All dates and spaces remain proposed.</a:t>
+              <a:t>The proposed week runs August 9–15, 2027. The project has no venue or date booking.</a:t>
             </a:r>
           </a:p>
           <a:p/>
@@ -1983,7 +1983,7 @@
           <a:p/>
           <a:p>
             <a:r>
-              <a:t>Status: working proposal; site/date/partners/funding/capacities unconfirmed. No external action is authorized by the deck.</a:t>
+              <a:t>Status: working proposal. Site, dates, partners, funding and capacity need confirmation. The deck grants no external-action authority.</a:t>
             </a:r>
           </a:p>
           <a:p>
@@ -2073,13 +2073,13 @@
           </a:p>
           <a:p>
             <a:r>
-              <a:t>The demand case to prove.</a:t>
+              <a:t>Buyer and sales targets</a:t>
             </a:r>
           </a:p>
           <a:p/>
           <a:p>
             <a:r>
-              <a:t>Targets are unvalidated; visitors, qualified households and completed purchases are different measures.</a:t>
+              <a:t>Demand research must test these targets. Count visits, households and completed purchases separately.</a:t>
             </a:r>
           </a:p>
           <a:p/>
@@ -2106,7 +2106,7 @@
           <a:p/>
           <a:p>
             <a:r>
-              <a:t>Status: working proposal; site/date/partners/funding/capacities unconfirmed. No external action is authorized by the deck.</a:t>
+              <a:t>Status: working proposal. Site, dates, partners, funding and capacity need confirmation. The deck grants no external-action authority.</a:t>
             </a:r>
           </a:p>
           <a:p>
@@ -2196,13 +2196,13 @@
           </a:p>
           <a:p>
             <a:r>
-              <a:t>Sell art with confidence.</a:t>
+              <a:t>Seller service and sale completion</a:t>
             </a:r>
           </a:p>
           <a:p/>
           <a:p>
             <a:r>
-              <a:t>Zero organizer art commission is proposed. Seller/gallery terms and external costs remain separate.</a:t>
+              <a:t>The proposal charges zero organizer art commission. Disclose seller, gallery and external costs separately.</a:t>
             </a:r>
           </a:p>
           <a:p/>
@@ -2224,7 +2224,7 @@
           <a:p/>
           <a:p>
             <a:r>
-              <a:t>Status: working proposal; site/date/partners/funding/capacities unconfirmed. No external action is authorized by the deck.</a:t>
+              <a:t>Status: working proposal. Site, dates, partners, funding and capacity need confirmation. The deck grants no external-action authority.</a:t>
             </a:r>
           </a:p>
           <a:p>
@@ -2314,13 +2314,13 @@
           </a:p>
           <a:p>
             <a:r>
-              <a:t>The organizer model.</a:t>
+              <a:t>Organizer revenue and costs</a:t>
             </a:r>
           </a:p>
           <a:p/>
           <a:p>
             <a:r>
-              <a:t>Illustrative core proposal; no funding, fees or demand is validated.</a:t>
+              <a:t>The core scenario uses unverified funding, fee and demand assumptions.</a:t>
             </a:r>
           </a:p>
           <a:p/>
@@ -2342,7 +2342,7 @@
           <a:p/>
           <a:p>
             <a:r>
-              <a:t>Status: working proposal; site/date/partners/funding/capacities unconfirmed. No external action is authorized by the deck.</a:t>
+              <a:t>Status: working proposal. Site, dates, partners, funding and capacity need confirmation. The deck grants no external-action authority.</a:t>
             </a:r>
           </a:p>
           <a:p>
@@ -2432,13 +2432,13 @@
           </a:p>
           <a:p>
             <a:r>
-              <a:t>A precise host arrangement.</a:t>
+              <a:t>Proposed venue terms</a:t>
             </a:r>
           </a:p>
           <a:p/>
           <a:p>
             <a:r>
-              <a:t>A discussion structure, not an agreed venue offer.</a:t>
+              <a:t>The parties need to agree the space, services and profit-share basis.</a:t>
             </a:r>
           </a:p>
           <a:p/>
@@ -2454,13 +2454,13 @@
           </a:p>
           <a:p>
             <a:r>
-              <a:t>Participation / 10–20% of defined distributable event profit; model comparison uses 15%.</a:t>
+              <a:t>Participation / 10–20% of defined distributable event profit. Model comparison uses 15%.</a:t>
             </a:r>
           </a:p>
           <a:p/>
           <a:p>
             <a:r>
-              <a:t>Status: working proposal; site/date/partners/funding/capacities unconfirmed. No external action is authorized by the deck.</a:t>
+              <a:t>Status: working proposal. Site, dates, partners, funding and capacity need confirmation. The deck grants no external-action authority.</a:t>
             </a:r>
           </a:p>
           <a:p>
@@ -6368,7 +6368,7 @@
               </a:defRPr>
             </a:pPr>
             <a:r>
-              <a:t>An honest owner-return illustration.</a:t>
+              <a:t>Owner profit-share calculation</a:t>
             </a:r>
           </a:p>
         </p:txBody>
@@ -6413,7 +6413,7 @@
               </a:defRPr>
             </a:pPr>
             <a:r>
-              <a:t>Art GMV is seller money. A share of distributable profit produces a much smaller amount.</a:t>
+              <a:t>Sellers keep artwork proceeds. This calculation applies the proposed owner share to event cash after reserves.</a:t>
             </a:r>
           </a:p>
         </p:txBody>
@@ -6679,7 +6679,7 @@
               </a:defRPr>
             </a:pPr>
             <a:r>
-              <a:t>Initially eligible after illustrative holds</a:t>
+              <a:t>Initial pool after model cash reserves</a:t>
             </a:r>
           </a:p>
         </p:txBody>
@@ -6945,7 +6945,7 @@
               </a:defRPr>
             </a:pPr>
             <a:r>
-              <a:t>Cumulative comparison only if claims hold is fully released</a:t>
+              <a:t>Cumulative comparison after a claim-free reserve release</a:t>
             </a:r>
           </a:p>
         </p:txBody>
@@ -7239,7 +7239,7 @@
               </a:defRPr>
             </a:pPr>
             <a:r>
-              <a:t>Serve the rental and leasing strategy.</a:t>
+              <a:t>Rental and office-leasing support</a:t>
             </a:r>
           </a:p>
         </p:txBody>
@@ -7284,7 +7284,7 @@
               </a:defRPr>
             </a:pPr>
             <a:r>
-              <a:t>Current published direction is rental housing plus retained office use; confirm the specific phase with the owner.</a:t>
+              <a:t>Published plans describe rentals and retained offices. Confirm the current phase with the owner.</a:t>
             </a:r>
           </a:p>
         </p:txBody>
@@ -7460,7 +7460,7 @@
               </a:defRPr>
             </a:pPr>
             <a:r>
-              <a:t>An excellent cultural</a:t>
+              <a:t>Art programming that</a:t>
             </a:r>
           </a:p>
           <a:p>
@@ -7482,7 +7482,7 @@
               </a:defRPr>
             </a:pPr>
             <a:r>
-              <a:t>experience and credible</a:t>
+              <a:t>complements the completed</a:t>
             </a:r>
           </a:p>
           <a:p>
@@ -7504,7 +7504,7 @@
               </a:defRPr>
             </a:pPr>
             <a:r>
-              <a:t>public narrative.</a:t>
+              <a:t>development.</a:t>
             </a:r>
           </a:p>
         </p:txBody>
@@ -7944,7 +7944,7 @@
               </a:defRPr>
             </a:pPr>
             <a:r>
-              <a:t>No unsupported</a:t>
+              <a:t>Use only areas the owner</a:t>
             </a:r>
           </a:p>
           <a:p>
@@ -7966,7 +7966,7 @@
               </a:defRPr>
             </a:pPr>
             <a:r>
-              <a:t>whole-building access or</a:t>
+              <a:t>approves and protect</a:t>
             </a:r>
           </a:p>
           <a:p>
@@ -7988,7 +7988,7 @@
               </a:defRPr>
             </a:pPr>
             <a:r>
-              <a:t>schedule interference.</a:t>
+              <a:t>construction schedules.</a:t>
             </a:r>
           </a:p>
         </p:txBody>
@@ -8282,29 +8282,7 @@
               </a:defRPr>
             </a:pPr>
             <a:r>
-              <a:t>Fund the evidence.</a:t>
-            </a:r>
-          </a:p>
-          <a:p>
-            <a:pPr>
-              <a:lnSpc>
-                <a:spcPct val="108000"/>
-              </a:lnSpc>
-              <a:spcBef>
-                <a:spcPts val="0"/>
-              </a:spcBef>
-              <a:spcAft>
-                <a:spcPts val="0"/>
-              </a:spcAft>
-              <a:defRPr sz="5000" b="1">
-                <a:solidFill>
-                  <a:srgbClr val="151A22"/>
-                </a:solidFill>
-                <a:latin typeface="Arial"/>
-              </a:defRPr>
-            </a:pPr>
-            <a:r>
-              <a:t>Then fund delivery.</a:t>
+              <a:t>Discovery funding and event finance</a:t>
             </a:r>
           </a:p>
         </p:txBody>
@@ -8317,7 +8295,7 @@
         </p:nvSpPr>
         <p:spPr>
           <a:xfrm>
-            <a:off x="914400" y="2585720"/>
+            <a:off x="914400" y="1887220"/>
             <a:ext cx="12618720" cy="1005840"/>
           </a:xfrm>
           <a:prstGeom prst="rect">
@@ -8349,7 +8327,7 @@
               </a:defRPr>
             </a:pPr>
             <a:r>
-              <a:t>Illustrative funding needs, not commitments or an investment offering.</a:t>
+              <a:t>These targets need contracts and usable cash. The deck makes no investment offer.</a:t>
             </a:r>
           </a:p>
         </p:txBody>
@@ -8362,8 +8340,8 @@
         </p:nvSpPr>
         <p:spPr>
           <a:xfrm>
-            <a:off x="914400" y="3190494"/>
-            <a:ext cx="4096511" cy="4152137"/>
+            <a:off x="914400" y="2852928"/>
+            <a:ext cx="4096511" cy="4489703"/>
           </a:xfrm>
           <a:prstGeom prst="rect">
             <a:avLst/>
@@ -8405,7 +8383,7 @@
         </p:nvSpPr>
         <p:spPr>
           <a:xfrm>
-            <a:off x="914400" y="3190494"/>
+            <a:off x="914400" y="2852928"/>
             <a:ext cx="4096511" cy="59436"/>
           </a:xfrm>
           <a:prstGeom prst="rect">
@@ -8448,7 +8426,7 @@
         </p:nvSpPr>
         <p:spPr>
           <a:xfrm>
-            <a:off x="1170432" y="3556254"/>
+            <a:off x="1170432" y="3218688"/>
             <a:ext cx="3584447" cy="1005840"/>
           </a:xfrm>
           <a:prstGeom prst="rect">
@@ -8493,8 +8471,8 @@
         </p:nvSpPr>
         <p:spPr>
           <a:xfrm>
-            <a:off x="1170432" y="4882134"/>
-            <a:ext cx="3584447" cy="2277617"/>
+            <a:off x="1170432" y="4544568"/>
+            <a:ext cx="3584447" cy="2615183"/>
           </a:xfrm>
           <a:prstGeom prst="rect">
             <a:avLst/>
@@ -8538,8 +8516,8 @@
         </p:nvSpPr>
         <p:spPr>
           <a:xfrm>
-            <a:off x="5266944" y="3190494"/>
-            <a:ext cx="4096511" cy="4152137"/>
+            <a:off x="5266944" y="2852928"/>
+            <a:ext cx="4096511" cy="4489703"/>
           </a:xfrm>
           <a:prstGeom prst="rect">
             <a:avLst/>
@@ -8581,7 +8559,7 @@
         </p:nvSpPr>
         <p:spPr>
           <a:xfrm>
-            <a:off x="5266944" y="3190494"/>
+            <a:off x="5266944" y="2852928"/>
             <a:ext cx="4096511" cy="59436"/>
           </a:xfrm>
           <a:prstGeom prst="rect">
@@ -8624,7 +8602,7 @@
         </p:nvSpPr>
         <p:spPr>
           <a:xfrm>
-            <a:off x="5522976" y="3556254"/>
+            <a:off x="5522976" y="3218688"/>
             <a:ext cx="3584447" cy="1005840"/>
           </a:xfrm>
           <a:prstGeom prst="rect">
@@ -8669,8 +8647,8 @@
         </p:nvSpPr>
         <p:spPr>
           <a:xfrm>
-            <a:off x="5522976" y="4882134"/>
-            <a:ext cx="3584447" cy="2277617"/>
+            <a:off x="5522976" y="4544568"/>
+            <a:ext cx="3584447" cy="2615183"/>
           </a:xfrm>
           <a:prstGeom prst="rect">
             <a:avLst/>
@@ -8714,8 +8692,8 @@
         </p:nvSpPr>
         <p:spPr>
           <a:xfrm>
-            <a:off x="9619488" y="3190494"/>
-            <a:ext cx="4096511" cy="4152137"/>
+            <a:off x="9619488" y="2852928"/>
+            <a:ext cx="4096511" cy="4489703"/>
           </a:xfrm>
           <a:prstGeom prst="rect">
             <a:avLst/>
@@ -8757,7 +8735,7 @@
         </p:nvSpPr>
         <p:spPr>
           <a:xfrm>
-            <a:off x="9619488" y="3190494"/>
+            <a:off x="9619488" y="2852928"/>
             <a:ext cx="4096511" cy="59436"/>
           </a:xfrm>
           <a:prstGeom prst="rect">
@@ -8800,7 +8778,7 @@
         </p:nvSpPr>
         <p:spPr>
           <a:xfrm>
-            <a:off x="9875519" y="3556254"/>
+            <a:off x="9875519" y="3218688"/>
             <a:ext cx="3584447" cy="1005840"/>
           </a:xfrm>
           <a:prstGeom prst="rect">
@@ -8845,8 +8823,8 @@
         </p:nvSpPr>
         <p:spPr>
           <a:xfrm>
-            <a:off x="9875519" y="4882134"/>
-            <a:ext cx="3584447" cy="2277617"/>
+            <a:off x="9875519" y="4544568"/>
+            <a:ext cx="3584447" cy="2615183"/>
           </a:xfrm>
           <a:prstGeom prst="rect">
             <a:avLst/>
@@ -9193,7 +9171,7 @@
               </a:defRPr>
             </a:pPr>
             <a:r>
-              <a:t>Build a team that can deliver.</a:t>
+              <a:t>Team roles and missing specialists</a:t>
             </a:r>
           </a:p>
         </p:txBody>
@@ -9238,7 +9216,7 @@
               </a:defRPr>
             </a:pPr>
             <a:r>
-              <a:t>Founding artistic, product/program and brand functions are identified; appointments and capacity require agreement.</a:t>
+              <a:t>The proposed founding functions cover art, product/program and brand. Hours and appointments remain open.</a:t>
             </a:r>
           </a:p>
         </p:txBody>
@@ -9414,7 +9392,7 @@
               </a:defRPr>
             </a:pPr>
             <a:r>
-              <a:t>Experienced delivery, site and</a:t>
+              <a:t>Delivery, site and agency</a:t>
             </a:r>
           </a:p>
           <a:p>
@@ -9436,7 +9414,29 @@
               </a:defRPr>
             </a:pPr>
             <a:r>
-              <a:t>city interfaces; role open.</a:t>
+              <a:t>coordination. The project</a:t>
+            </a:r>
+          </a:p>
+          <a:p>
+            <a:pPr>
+              <a:lnSpc>
+                <a:spcPct val="108000"/>
+              </a:lnSpc>
+              <a:spcBef>
+                <a:spcPts val="0"/>
+              </a:spcBef>
+              <a:spcAft>
+                <a:spcPts val="0"/>
+              </a:spcAft>
+              <a:defRPr sz="2100" b="0">
+                <a:solidFill>
+                  <a:srgbClr val="151A22"/>
+                </a:solidFill>
+                <a:latin typeface="Arial"/>
+              </a:defRPr>
+            </a:pPr>
+            <a:r>
+              <a:t>needs to fill this role.</a:t>
             </a:r>
           </a:p>
         </p:txBody>
@@ -10192,7 +10192,7 @@
               </a:defRPr>
             </a:pPr>
             <a:r>
-              <a:t>A good neighbor.</a:t>
+              <a:t>Construction and public-use</a:t>
             </a:r>
           </a:p>
           <a:p>
@@ -10214,7 +10214,7 @@
               </a:defRPr>
             </a:pPr>
             <a:r>
-              <a:t>A controlled project.</a:t>
+              <a:t>requirements</a:t>
             </a:r>
           </a:p>
         </p:txBody>
@@ -10259,7 +10259,7 @@
               </a:defRPr>
             </a:pPr>
             <a:r>
-              <a:t>The reported construction period overlaps summer 2027. Availability must be established, not assumed.</a:t>
+              <a:t>Reported construction overlaps summer 2027. The owner must confirm whether any suitable area is available.</a:t>
             </a:r>
           </a:p>
         </p:txBody>
@@ -11213,7 +11213,7 @@
               </a:defRPr>
             </a:pPr>
             <a:r>
-              <a:t>Six weeks to a useful decision.</a:t>
+              <a:t>Six-week discovery plan</a:t>
             </a:r>
           </a:p>
         </p:txBody>
@@ -11258,7 +11258,7 @@
               </a:defRPr>
             </a:pPr>
             <a:r>
-              <a:t>Proposed discovery structure; no full event commitment is requested at this stage.</a:t>
+              <a:t>The first decision concerns paid feasibility. Event approval follows the results.</a:t>
             </a:r>
           </a:p>
         </p:txBody>
@@ -12476,29 +12476,7 @@
               </a:defRPr>
             </a:pPr>
             <a:r>
-              <a:t>Authorize a bounded</a:t>
-            </a:r>
-          </a:p>
-          <a:p>
-            <a:pPr>
-              <a:lnSpc>
-                <a:spcPct val="108000"/>
-              </a:lnSpc>
-              <a:spcBef>
-                <a:spcPts val="0"/>
-              </a:spcBef>
-              <a:spcAft>
-                <a:spcPts val="0"/>
-              </a:spcAft>
-              <a:defRPr sz="5200" b="1">
-                <a:solidFill>
-                  <a:srgbClr val="F3F0E9"/>
-                </a:solidFill>
-                <a:latin typeface="Arial"/>
-              </a:defRPr>
-            </a:pPr>
-            <a:r>
-              <a:t>investigation.</a:t>
+              <a:t>Discovery decision</a:t>
             </a:r>
           </a:p>
         </p:txBody>
@@ -12511,7 +12489,7 @@
         </p:nvSpPr>
         <p:spPr>
           <a:xfrm>
-            <a:off x="914400" y="3250184"/>
+            <a:off x="914400" y="2470912"/>
             <a:ext cx="9601200" cy="1371600"/>
           </a:xfrm>
           <a:prstGeom prst="rect">
@@ -12543,7 +12521,7 @@
               </a:defRPr>
             </a:pPr>
             <a:r>
-              <a:t>Next decision: nominate the owner counterpart, share the site/phasing</a:t>
+              <a:t>The owner would identify a responsible contact, share plans and phasing,</a:t>
             </a:r>
           </a:p>
           <a:p>
@@ -12565,7 +12543,7 @@
               </a:defRPr>
             </a:pPr>
             <a:r>
-              <a:t>evidence and agree a funded discovery scope.</a:t>
+              <a:t>and agree a funded discovery scope.</a:t>
             </a:r>
           </a:p>
         </p:txBody>
@@ -12578,7 +12556,7 @@
         </p:nvSpPr>
         <p:spPr>
           <a:xfrm>
-            <a:off x="914400" y="4259580"/>
+            <a:off x="914400" y="4160520"/>
             <a:ext cx="73152" cy="384048"/>
           </a:xfrm>
           <a:prstGeom prst="rect">
@@ -12621,7 +12599,7 @@
         </p:nvSpPr>
         <p:spPr>
           <a:xfrm>
-            <a:off x="1188720" y="4259580"/>
+            <a:off x="1188720" y="4160520"/>
             <a:ext cx="9235440" cy="640080"/>
           </a:xfrm>
           <a:prstGeom prst="rect">
@@ -12666,7 +12644,7 @@
         </p:nvSpPr>
         <p:spPr>
           <a:xfrm>
-            <a:off x="914400" y="4991100"/>
+            <a:off x="914400" y="4892040"/>
             <a:ext cx="73152" cy="384048"/>
           </a:xfrm>
           <a:prstGeom prst="rect">
@@ -12709,7 +12687,7 @@
         </p:nvSpPr>
         <p:spPr>
           <a:xfrm>
-            <a:off x="1188720" y="4991100"/>
+            <a:off x="1188720" y="4892040"/>
             <a:ext cx="9235440" cy="640080"/>
           </a:xfrm>
           <a:prstGeom prst="rect">
@@ -12754,7 +12732,7 @@
         </p:nvSpPr>
         <p:spPr>
           <a:xfrm>
-            <a:off x="914400" y="5722620"/>
+            <a:off x="914400" y="5623560"/>
             <a:ext cx="73152" cy="384048"/>
           </a:xfrm>
           <a:prstGeom prst="rect">
@@ -12797,7 +12775,7 @@
         </p:nvSpPr>
         <p:spPr>
           <a:xfrm>
-            <a:off x="1188720" y="5722620"/>
+            <a:off x="1188720" y="5623560"/>
             <a:ext cx="9235440" cy="640080"/>
           </a:xfrm>
           <a:prstGeom prst="rect">
@@ -13467,7 +13445,7 @@
               </a:defRPr>
             </a:pPr>
             <a:r>
-              <a:t>The evidence and the conditions.</a:t>
+              <a:t>Sources and open conditions</a:t>
             </a:r>
           </a:p>
         </p:txBody>
@@ -13512,7 +13490,7 @@
               </a:defRPr>
             </a:pPr>
             <a:r>
-              <a:t>Current proposal, October 24, 2026. Site/date, funding, participants and capacities are unconfirmed.</a:t>
+              <a:t>October 24, 2026. Venue, dates, funding, partners and capacity still need confirmation.</a:t>
             </a:r>
           </a:p>
         </p:txBody>
@@ -13872,7 +13850,7 @@
               </a:defRPr>
             </a:pPr>
             <a:r>
-              <a:t>Original concept graphics; no third-party artwork or partner logos reused.</a:t>
+              <a:t>Original concept graphics. The deck contains no third-party art or partner logos.</a:t>
             </a:r>
           </a:p>
         </p:txBody>
@@ -14166,7 +14144,7 @@
               </a:defRPr>
             </a:pPr>
             <a:r>
-              <a:t>Give the address a cultural life.</a:t>
+              <a:t>Art at Denver Energy Center</a:t>
             </a:r>
           </a:p>
         </p:txBody>
@@ -14211,7 +14189,7 @@
               </a:defRPr>
             </a:pPr>
             <a:r>
-              <a:t>A bounded art activation designed to serve the project and the people who make art.</a:t>
+              <a:t>The proposal combines an art market, commissioned work and free public access within an approved footprint.</a:t>
             </a:r>
           </a:p>
         </p:txBody>
@@ -14387,7 +14365,7 @@
               </a:defRPr>
             </a:pPr>
             <a:r>
-              <a:t>Exceptional work and</a:t>
+              <a:t>Artists and galleries present</a:t>
             </a:r>
           </a:p>
           <a:p>
@@ -14409,7 +14387,7 @@
               </a:defRPr>
             </a:pPr>
             <a:r>
-              <a:t>artist-authored rooms create a</a:t>
+              <a:t>selected work in individual</a:t>
             </a:r>
           </a:p>
           <a:p>
@@ -14431,7 +14409,7 @@
               </a:defRPr>
             </a:pPr>
             <a:r>
-              <a:t>compelling destination.</a:t>
+              <a:t>rooms.</a:t>
             </a:r>
           </a:p>
         </p:txBody>
@@ -14607,7 +14585,7 @@
               </a:defRPr>
             </a:pPr>
             <a:r>
-              <a:t>Collectors meet trusted</a:t>
+              <a:t>Buyers get appointments,</a:t>
             </a:r>
           </a:p>
           <a:p>
@@ -14629,7 +14607,7 @@
               </a:defRPr>
             </a:pPr>
             <a:r>
-              <a:t>sellers, with time, context and</a:t>
+              <a:t>work records, seller invoices</a:t>
             </a:r>
           </a:p>
           <a:p>
@@ -14651,7 +14629,7 @@
               </a:defRPr>
             </a:pPr>
             <a:r>
-              <a:t>dependable service.</a:t>
+              <a:t>and delivery support.</a:t>
             </a:r>
           </a:p>
         </p:txBody>
@@ -15165,7 +15143,7 @@
               </a:defRPr>
             </a:pPr>
             <a:r>
-              <a:t>The ordinary becomes extraordinary.</a:t>
+              <a:t>Art in former offices</a:t>
             </a:r>
           </a:p>
         </p:txBody>
@@ -15210,7 +15188,7 @@
               </a:defRPr>
             </a:pPr>
             <a:r>
-              <a:t>An office complex becomes an art fair, exhibition, workshop and place to encounter what is possible.</a:t>
+              <a:t>The proposed fair combines gallery rooms, artist work, workshops and buying appointments.</a:t>
             </a:r>
           </a:p>
         </p:txBody>
@@ -15474,7 +15452,7 @@
               </a:defRPr>
             </a:pPr>
             <a:r>
-              <a:t>Artist authorship and buying confidence lead the experience.</a:t>
+              <a:t>Artists control their work. Sellers supply accurate records and purchase terms.</a:t>
             </a:r>
           </a:p>
         </p:txBody>
@@ -15768,29 +15746,7 @@
               </a:defRPr>
             </a:pPr>
             <a:r>
-              <a:t>One coherent edition.</a:t>
-            </a:r>
-          </a:p>
-          <a:p>
-            <a:pPr>
-              <a:lnSpc>
-                <a:spcPct val="108000"/>
-              </a:lnSpc>
-              <a:spcBef>
-                <a:spcPts val="0"/>
-              </a:spcBef>
-              <a:spcAft>
-                <a:spcPts val="0"/>
-              </a:spcAft>
-              <a:defRPr sz="5000" b="1">
-                <a:solidFill>
-                  <a:srgbClr val="151A22"/>
-                </a:solidFill>
-                <a:latin typeface="Arial"/>
-              </a:defRPr>
-            </a:pPr>
-            <a:r>
-              <a:t>Room to grow.</a:t>
+              <a:t>Proposed allocation of 60 spaces</a:t>
             </a:r>
           </a:p>
         </p:txBody>
@@ -15803,7 +15759,7 @@
         </p:nvSpPr>
         <p:spPr>
           <a:xfrm>
-            <a:off x="914400" y="2585720"/>
+            <a:off x="914400" y="1887220"/>
             <a:ext cx="12618720" cy="1005840"/>
           </a:xfrm>
           <a:prstGeom prst="rect">
@@ -15835,7 +15791,7 @@
               </a:defRPr>
             </a:pPr>
             <a:r>
-              <a:t>60 programmed rooms or equivalent spaces is the proposed core—not a surveyed floor plan.</a:t>
+              <a:t>A site survey must establish where these 60 program functions can fit.</a:t>
             </a:r>
           </a:p>
         </p:txBody>
@@ -15848,8 +15804,8 @@
         </p:nvSpPr>
         <p:spPr>
           <a:xfrm>
-            <a:off x="914400" y="3190494"/>
-            <a:ext cx="612648" cy="557910"/>
+            <a:off x="914400" y="2852928"/>
+            <a:ext cx="612648" cy="614171"/>
           </a:xfrm>
           <a:prstGeom prst="rect">
             <a:avLst/>
@@ -15891,8 +15847,8 @@
         </p:nvSpPr>
         <p:spPr>
           <a:xfrm>
-            <a:off x="1600200" y="3190494"/>
-            <a:ext cx="612648" cy="557910"/>
+            <a:off x="1600200" y="2852928"/>
+            <a:ext cx="612648" cy="614171"/>
           </a:xfrm>
           <a:prstGeom prst="rect">
             <a:avLst/>
@@ -15934,8 +15890,8 @@
         </p:nvSpPr>
         <p:spPr>
           <a:xfrm>
-            <a:off x="2286000" y="3190494"/>
-            <a:ext cx="612648" cy="557910"/>
+            <a:off x="2286000" y="2852928"/>
+            <a:ext cx="612648" cy="614171"/>
           </a:xfrm>
           <a:prstGeom prst="rect">
             <a:avLst/>
@@ -15977,8 +15933,8 @@
         </p:nvSpPr>
         <p:spPr>
           <a:xfrm>
-            <a:off x="2971800" y="3190494"/>
-            <a:ext cx="612648" cy="557910"/>
+            <a:off x="2971800" y="2852928"/>
+            <a:ext cx="612648" cy="614171"/>
           </a:xfrm>
           <a:prstGeom prst="rect">
             <a:avLst/>
@@ -16020,8 +15976,8 @@
         </p:nvSpPr>
         <p:spPr>
           <a:xfrm>
-            <a:off x="3657600" y="3190494"/>
-            <a:ext cx="612648" cy="557910"/>
+            <a:off x="3657600" y="2852928"/>
+            <a:ext cx="612648" cy="614171"/>
           </a:xfrm>
           <a:prstGeom prst="rect">
             <a:avLst/>
@@ -16063,8 +16019,8 @@
         </p:nvSpPr>
         <p:spPr>
           <a:xfrm>
-            <a:off x="4343400" y="3190494"/>
-            <a:ext cx="612648" cy="557910"/>
+            <a:off x="4343400" y="2852928"/>
+            <a:ext cx="612648" cy="614171"/>
           </a:xfrm>
           <a:prstGeom prst="rect">
             <a:avLst/>
@@ -16106,8 +16062,8 @@
         </p:nvSpPr>
         <p:spPr>
           <a:xfrm>
-            <a:off x="5029200" y="3190494"/>
-            <a:ext cx="612648" cy="557910"/>
+            <a:off x="5029200" y="2852928"/>
+            <a:ext cx="612648" cy="614171"/>
           </a:xfrm>
           <a:prstGeom prst="rect">
             <a:avLst/>
@@ -16149,8 +16105,8 @@
         </p:nvSpPr>
         <p:spPr>
           <a:xfrm>
-            <a:off x="5715000" y="3190494"/>
-            <a:ext cx="612648" cy="557910"/>
+            <a:off x="5715000" y="2852928"/>
+            <a:ext cx="612648" cy="614171"/>
           </a:xfrm>
           <a:prstGeom prst="rect">
             <a:avLst/>
@@ -16192,8 +16148,8 @@
         </p:nvSpPr>
         <p:spPr>
           <a:xfrm>
-            <a:off x="6400800" y="3190494"/>
-            <a:ext cx="612648" cy="557910"/>
+            <a:off x="6400800" y="2852928"/>
+            <a:ext cx="612648" cy="614171"/>
           </a:xfrm>
           <a:prstGeom prst="rect">
             <a:avLst/>
@@ -16235,8 +16191,8 @@
         </p:nvSpPr>
         <p:spPr>
           <a:xfrm>
-            <a:off x="7086600" y="3190494"/>
-            <a:ext cx="612648" cy="557910"/>
+            <a:off x="7086600" y="2852928"/>
+            <a:ext cx="612648" cy="614171"/>
           </a:xfrm>
           <a:prstGeom prst="rect">
             <a:avLst/>
@@ -16278,8 +16234,8 @@
         </p:nvSpPr>
         <p:spPr>
           <a:xfrm>
-            <a:off x="914400" y="3821557"/>
-            <a:ext cx="612648" cy="557910"/>
+            <a:off x="914400" y="3540252"/>
+            <a:ext cx="612648" cy="614171"/>
           </a:xfrm>
           <a:prstGeom prst="rect">
             <a:avLst/>
@@ -16321,8 +16277,8 @@
         </p:nvSpPr>
         <p:spPr>
           <a:xfrm>
-            <a:off x="1600200" y="3821557"/>
-            <a:ext cx="612648" cy="557910"/>
+            <a:off x="1600200" y="3540252"/>
+            <a:ext cx="612648" cy="614171"/>
           </a:xfrm>
           <a:prstGeom prst="rect">
             <a:avLst/>
@@ -16364,8 +16320,8 @@
         </p:nvSpPr>
         <p:spPr>
           <a:xfrm>
-            <a:off x="2286000" y="3821557"/>
-            <a:ext cx="612648" cy="557910"/>
+            <a:off x="2286000" y="3540252"/>
+            <a:ext cx="612648" cy="614171"/>
           </a:xfrm>
           <a:prstGeom prst="rect">
             <a:avLst/>
@@ -16407,8 +16363,8 @@
         </p:nvSpPr>
         <p:spPr>
           <a:xfrm>
-            <a:off x="2971800" y="3821557"/>
-            <a:ext cx="612648" cy="557910"/>
+            <a:off x="2971800" y="3540252"/>
+            <a:ext cx="612648" cy="614171"/>
           </a:xfrm>
           <a:prstGeom prst="rect">
             <a:avLst/>
@@ -16450,8 +16406,8 @@
         </p:nvSpPr>
         <p:spPr>
           <a:xfrm>
-            <a:off x="3657600" y="3821557"/>
-            <a:ext cx="612648" cy="557910"/>
+            <a:off x="3657600" y="3540252"/>
+            <a:ext cx="612648" cy="614171"/>
           </a:xfrm>
           <a:prstGeom prst="rect">
             <a:avLst/>
@@ -16493,8 +16449,8 @@
         </p:nvSpPr>
         <p:spPr>
           <a:xfrm>
-            <a:off x="4343400" y="3821557"/>
-            <a:ext cx="612648" cy="557910"/>
+            <a:off x="4343400" y="3540252"/>
+            <a:ext cx="612648" cy="614171"/>
           </a:xfrm>
           <a:prstGeom prst="rect">
             <a:avLst/>
@@ -16536,8 +16492,8 @@
         </p:nvSpPr>
         <p:spPr>
           <a:xfrm>
-            <a:off x="5029200" y="3821557"/>
-            <a:ext cx="612648" cy="557910"/>
+            <a:off x="5029200" y="3540252"/>
+            <a:ext cx="612648" cy="614171"/>
           </a:xfrm>
           <a:prstGeom prst="rect">
             <a:avLst/>
@@ -16579,8 +16535,8 @@
         </p:nvSpPr>
         <p:spPr>
           <a:xfrm>
-            <a:off x="5715000" y="3821557"/>
-            <a:ext cx="612648" cy="557910"/>
+            <a:off x="5715000" y="3540252"/>
+            <a:ext cx="612648" cy="614171"/>
           </a:xfrm>
           <a:prstGeom prst="rect">
             <a:avLst/>
@@ -16622,8 +16578,8 @@
         </p:nvSpPr>
         <p:spPr>
           <a:xfrm>
-            <a:off x="6400800" y="3821557"/>
-            <a:ext cx="612648" cy="557910"/>
+            <a:off x="6400800" y="3540252"/>
+            <a:ext cx="612648" cy="614171"/>
           </a:xfrm>
           <a:prstGeom prst="rect">
             <a:avLst/>
@@ -16665,8 +16621,8 @@
         </p:nvSpPr>
         <p:spPr>
           <a:xfrm>
-            <a:off x="7086600" y="3821557"/>
-            <a:ext cx="612648" cy="557910"/>
+            <a:off x="7086600" y="3540252"/>
+            <a:ext cx="612648" cy="614171"/>
           </a:xfrm>
           <a:prstGeom prst="rect">
             <a:avLst/>
@@ -16708,8 +16664,8 @@
         </p:nvSpPr>
         <p:spPr>
           <a:xfrm>
-            <a:off x="914400" y="4452620"/>
-            <a:ext cx="612648" cy="557910"/>
+            <a:off x="914400" y="4227576"/>
+            <a:ext cx="612648" cy="614171"/>
           </a:xfrm>
           <a:prstGeom prst="rect">
             <a:avLst/>
@@ -16751,8 +16707,8 @@
         </p:nvSpPr>
         <p:spPr>
           <a:xfrm>
-            <a:off x="1600200" y="4452620"/>
-            <a:ext cx="612648" cy="557910"/>
+            <a:off x="1600200" y="4227576"/>
+            <a:ext cx="612648" cy="614171"/>
           </a:xfrm>
           <a:prstGeom prst="rect">
             <a:avLst/>
@@ -16794,8 +16750,8 @@
         </p:nvSpPr>
         <p:spPr>
           <a:xfrm>
-            <a:off x="2286000" y="4452620"/>
-            <a:ext cx="612648" cy="557910"/>
+            <a:off x="2286000" y="4227576"/>
+            <a:ext cx="612648" cy="614171"/>
           </a:xfrm>
           <a:prstGeom prst="rect">
             <a:avLst/>
@@ -16837,8 +16793,8 @@
         </p:nvSpPr>
         <p:spPr>
           <a:xfrm>
-            <a:off x="2971800" y="4452620"/>
-            <a:ext cx="612648" cy="557910"/>
+            <a:off x="2971800" y="4227576"/>
+            <a:ext cx="612648" cy="614171"/>
           </a:xfrm>
           <a:prstGeom prst="rect">
             <a:avLst/>
@@ -16880,8 +16836,8 @@
         </p:nvSpPr>
         <p:spPr>
           <a:xfrm>
-            <a:off x="3657600" y="4452620"/>
-            <a:ext cx="612648" cy="557910"/>
+            <a:off x="3657600" y="4227576"/>
+            <a:ext cx="612648" cy="614171"/>
           </a:xfrm>
           <a:prstGeom prst="rect">
             <a:avLst/>
@@ -16923,8 +16879,8 @@
         </p:nvSpPr>
         <p:spPr>
           <a:xfrm>
-            <a:off x="4343400" y="4452620"/>
-            <a:ext cx="612648" cy="557910"/>
+            <a:off x="4343400" y="4227576"/>
+            <a:ext cx="612648" cy="614171"/>
           </a:xfrm>
           <a:prstGeom prst="rect">
             <a:avLst/>
@@ -16966,8 +16922,8 @@
         </p:nvSpPr>
         <p:spPr>
           <a:xfrm>
-            <a:off x="5029200" y="4452620"/>
-            <a:ext cx="612648" cy="557910"/>
+            <a:off x="5029200" y="4227576"/>
+            <a:ext cx="612648" cy="614171"/>
           </a:xfrm>
           <a:prstGeom prst="rect">
             <a:avLst/>
@@ -17009,8 +16965,8 @@
         </p:nvSpPr>
         <p:spPr>
           <a:xfrm>
-            <a:off x="5715000" y="4452620"/>
-            <a:ext cx="612648" cy="557910"/>
+            <a:off x="5715000" y="4227576"/>
+            <a:ext cx="612648" cy="614171"/>
           </a:xfrm>
           <a:prstGeom prst="rect">
             <a:avLst/>
@@ -17052,8 +17008,8 @@
         </p:nvSpPr>
         <p:spPr>
           <a:xfrm>
-            <a:off x="6400800" y="4452620"/>
-            <a:ext cx="612648" cy="557910"/>
+            <a:off x="6400800" y="4227576"/>
+            <a:ext cx="612648" cy="614171"/>
           </a:xfrm>
           <a:prstGeom prst="rect">
             <a:avLst/>
@@ -17095,8 +17051,8 @@
         </p:nvSpPr>
         <p:spPr>
           <a:xfrm>
-            <a:off x="7086600" y="4452620"/>
-            <a:ext cx="612648" cy="557910"/>
+            <a:off x="7086600" y="4227576"/>
+            <a:ext cx="612648" cy="614171"/>
           </a:xfrm>
           <a:prstGeom prst="rect">
             <a:avLst/>
@@ -17138,8 +17094,8 @@
         </p:nvSpPr>
         <p:spPr>
           <a:xfrm>
-            <a:off x="914400" y="5083682"/>
-            <a:ext cx="612648" cy="557910"/>
+            <a:off x="914400" y="4914900"/>
+            <a:ext cx="612648" cy="614171"/>
           </a:xfrm>
           <a:prstGeom prst="rect">
             <a:avLst/>
@@ -17181,8 +17137,8 @@
         </p:nvSpPr>
         <p:spPr>
           <a:xfrm>
-            <a:off x="1600200" y="5083682"/>
-            <a:ext cx="612648" cy="557910"/>
+            <a:off x="1600200" y="4914900"/>
+            <a:ext cx="612648" cy="614171"/>
           </a:xfrm>
           <a:prstGeom prst="rect">
             <a:avLst/>
@@ -17224,8 +17180,8 @@
         </p:nvSpPr>
         <p:spPr>
           <a:xfrm>
-            <a:off x="2286000" y="5083682"/>
-            <a:ext cx="612648" cy="557910"/>
+            <a:off x="2286000" y="4914900"/>
+            <a:ext cx="612648" cy="614171"/>
           </a:xfrm>
           <a:prstGeom prst="rect">
             <a:avLst/>
@@ -17267,8 +17223,8 @@
         </p:nvSpPr>
         <p:spPr>
           <a:xfrm>
-            <a:off x="2971800" y="5083682"/>
-            <a:ext cx="612648" cy="557910"/>
+            <a:off x="2971800" y="4914900"/>
+            <a:ext cx="612648" cy="614171"/>
           </a:xfrm>
           <a:prstGeom prst="rect">
             <a:avLst/>
@@ -17310,8 +17266,8 @@
         </p:nvSpPr>
         <p:spPr>
           <a:xfrm>
-            <a:off x="3657600" y="5083682"/>
-            <a:ext cx="612648" cy="557910"/>
+            <a:off x="3657600" y="4914900"/>
+            <a:ext cx="612648" cy="614171"/>
           </a:xfrm>
           <a:prstGeom prst="rect">
             <a:avLst/>
@@ -17353,8 +17309,8 @@
         </p:nvSpPr>
         <p:spPr>
           <a:xfrm>
-            <a:off x="4343400" y="5083682"/>
-            <a:ext cx="612648" cy="557910"/>
+            <a:off x="4343400" y="4914900"/>
+            <a:ext cx="612648" cy="614171"/>
           </a:xfrm>
           <a:prstGeom prst="rect">
             <a:avLst/>
@@ -17396,8 +17352,8 @@
         </p:nvSpPr>
         <p:spPr>
           <a:xfrm>
-            <a:off x="5029200" y="5083682"/>
-            <a:ext cx="612648" cy="557910"/>
+            <a:off x="5029200" y="4914900"/>
+            <a:ext cx="612648" cy="614171"/>
           </a:xfrm>
           <a:prstGeom prst="rect">
             <a:avLst/>
@@ -17439,8 +17395,8 @@
         </p:nvSpPr>
         <p:spPr>
           <a:xfrm>
-            <a:off x="5715000" y="5083682"/>
-            <a:ext cx="612648" cy="557910"/>
+            <a:off x="5715000" y="4914900"/>
+            <a:ext cx="612648" cy="614171"/>
           </a:xfrm>
           <a:prstGeom prst="rect">
             <a:avLst/>
@@ -17482,8 +17438,8 @@
         </p:nvSpPr>
         <p:spPr>
           <a:xfrm>
-            <a:off x="6400800" y="5083682"/>
-            <a:ext cx="612648" cy="557910"/>
+            <a:off x="6400800" y="4914900"/>
+            <a:ext cx="612648" cy="614171"/>
           </a:xfrm>
           <a:prstGeom prst="rect">
             <a:avLst/>
@@ -17525,8 +17481,8 @@
         </p:nvSpPr>
         <p:spPr>
           <a:xfrm>
-            <a:off x="7086600" y="5083682"/>
-            <a:ext cx="612648" cy="557910"/>
+            <a:off x="7086600" y="4914900"/>
+            <a:ext cx="612648" cy="614171"/>
           </a:xfrm>
           <a:prstGeom prst="rect">
             <a:avLst/>
@@ -17568,8 +17524,8 @@
         </p:nvSpPr>
         <p:spPr>
           <a:xfrm>
-            <a:off x="914400" y="5714745"/>
-            <a:ext cx="612648" cy="557910"/>
+            <a:off x="914400" y="5602223"/>
+            <a:ext cx="612648" cy="614171"/>
           </a:xfrm>
           <a:prstGeom prst="rect">
             <a:avLst/>
@@ -17611,8 +17567,8 @@
         </p:nvSpPr>
         <p:spPr>
           <a:xfrm>
-            <a:off x="1600200" y="5714745"/>
-            <a:ext cx="612648" cy="557910"/>
+            <a:off x="1600200" y="5602223"/>
+            <a:ext cx="612648" cy="614171"/>
           </a:xfrm>
           <a:prstGeom prst="rect">
             <a:avLst/>
@@ -17654,8 +17610,8 @@
         </p:nvSpPr>
         <p:spPr>
           <a:xfrm>
-            <a:off x="2286000" y="5714745"/>
-            <a:ext cx="612648" cy="557910"/>
+            <a:off x="2286000" y="5602223"/>
+            <a:ext cx="612648" cy="614171"/>
           </a:xfrm>
           <a:prstGeom prst="rect">
             <a:avLst/>
@@ -17697,8 +17653,8 @@
         </p:nvSpPr>
         <p:spPr>
           <a:xfrm>
-            <a:off x="2971800" y="5714745"/>
-            <a:ext cx="612648" cy="557910"/>
+            <a:off x="2971800" y="5602223"/>
+            <a:ext cx="612648" cy="614171"/>
           </a:xfrm>
           <a:prstGeom prst="rect">
             <a:avLst/>
@@ -17740,8 +17696,8 @@
         </p:nvSpPr>
         <p:spPr>
           <a:xfrm>
-            <a:off x="3657600" y="5714745"/>
-            <a:ext cx="612648" cy="557910"/>
+            <a:off x="3657600" y="5602223"/>
+            <a:ext cx="612648" cy="614171"/>
           </a:xfrm>
           <a:prstGeom prst="rect">
             <a:avLst/>
@@ -17783,8 +17739,8 @@
         </p:nvSpPr>
         <p:spPr>
           <a:xfrm>
-            <a:off x="4343400" y="5714745"/>
-            <a:ext cx="612648" cy="557910"/>
+            <a:off x="4343400" y="5602223"/>
+            <a:ext cx="612648" cy="614171"/>
           </a:xfrm>
           <a:prstGeom prst="rect">
             <a:avLst/>
@@ -17826,8 +17782,8 @@
         </p:nvSpPr>
         <p:spPr>
           <a:xfrm>
-            <a:off x="5029200" y="5714745"/>
-            <a:ext cx="612648" cy="557910"/>
+            <a:off x="5029200" y="5602223"/>
+            <a:ext cx="612648" cy="614171"/>
           </a:xfrm>
           <a:prstGeom prst="rect">
             <a:avLst/>
@@ -17869,8 +17825,8 @@
         </p:nvSpPr>
         <p:spPr>
           <a:xfrm>
-            <a:off x="5715000" y="5714745"/>
-            <a:ext cx="612648" cy="557910"/>
+            <a:off x="5715000" y="5602223"/>
+            <a:ext cx="612648" cy="614171"/>
           </a:xfrm>
           <a:prstGeom prst="rect">
             <a:avLst/>
@@ -17912,8 +17868,8 @@
         </p:nvSpPr>
         <p:spPr>
           <a:xfrm>
-            <a:off x="6400800" y="5714745"/>
-            <a:ext cx="612648" cy="557910"/>
+            <a:off x="6400800" y="5602223"/>
+            <a:ext cx="612648" cy="614171"/>
           </a:xfrm>
           <a:prstGeom prst="rect">
             <a:avLst/>
@@ -17955,8 +17911,8 @@
         </p:nvSpPr>
         <p:spPr>
           <a:xfrm>
-            <a:off x="7086600" y="5714745"/>
-            <a:ext cx="612648" cy="557910"/>
+            <a:off x="7086600" y="5602223"/>
+            <a:ext cx="612648" cy="614171"/>
           </a:xfrm>
           <a:prstGeom prst="rect">
             <a:avLst/>
@@ -17998,8 +17954,8 @@
         </p:nvSpPr>
         <p:spPr>
           <a:xfrm>
-            <a:off x="914400" y="6345808"/>
-            <a:ext cx="612648" cy="557910"/>
+            <a:off x="914400" y="6289547"/>
+            <a:ext cx="612648" cy="614171"/>
           </a:xfrm>
           <a:prstGeom prst="rect">
             <a:avLst/>
@@ -18041,8 +17997,8 @@
         </p:nvSpPr>
         <p:spPr>
           <a:xfrm>
-            <a:off x="1600200" y="6345808"/>
-            <a:ext cx="612648" cy="557910"/>
+            <a:off x="1600200" y="6289547"/>
+            <a:ext cx="612648" cy="614171"/>
           </a:xfrm>
           <a:prstGeom prst="rect">
             <a:avLst/>
@@ -18084,8 +18040,8 @@
         </p:nvSpPr>
         <p:spPr>
           <a:xfrm>
-            <a:off x="2286000" y="6345808"/>
-            <a:ext cx="612648" cy="557910"/>
+            <a:off x="2286000" y="6289547"/>
+            <a:ext cx="612648" cy="614171"/>
           </a:xfrm>
           <a:prstGeom prst="rect">
             <a:avLst/>
@@ -18127,8 +18083,8 @@
         </p:nvSpPr>
         <p:spPr>
           <a:xfrm>
-            <a:off x="2971800" y="6345808"/>
-            <a:ext cx="612648" cy="557910"/>
+            <a:off x="2971800" y="6289547"/>
+            <a:ext cx="612648" cy="614171"/>
           </a:xfrm>
           <a:prstGeom prst="rect">
             <a:avLst/>
@@ -18170,8 +18126,8 @@
         </p:nvSpPr>
         <p:spPr>
           <a:xfrm>
-            <a:off x="3657600" y="6345808"/>
-            <a:ext cx="612648" cy="557910"/>
+            <a:off x="3657600" y="6289547"/>
+            <a:ext cx="612648" cy="614171"/>
           </a:xfrm>
           <a:prstGeom prst="rect">
             <a:avLst/>
@@ -18213,8 +18169,8 @@
         </p:nvSpPr>
         <p:spPr>
           <a:xfrm>
-            <a:off x="4343400" y="6345808"/>
-            <a:ext cx="612648" cy="557910"/>
+            <a:off x="4343400" y="6289547"/>
+            <a:ext cx="612648" cy="614171"/>
           </a:xfrm>
           <a:prstGeom prst="rect">
             <a:avLst/>
@@ -18256,8 +18212,8 @@
         </p:nvSpPr>
         <p:spPr>
           <a:xfrm>
-            <a:off x="5029200" y="6345808"/>
-            <a:ext cx="612648" cy="557910"/>
+            <a:off x="5029200" y="6289547"/>
+            <a:ext cx="612648" cy="614171"/>
           </a:xfrm>
           <a:prstGeom prst="rect">
             <a:avLst/>
@@ -18299,8 +18255,8 @@
         </p:nvSpPr>
         <p:spPr>
           <a:xfrm>
-            <a:off x="5715000" y="6345808"/>
-            <a:ext cx="612648" cy="557910"/>
+            <a:off x="5715000" y="6289547"/>
+            <a:ext cx="612648" cy="614171"/>
           </a:xfrm>
           <a:prstGeom prst="rect">
             <a:avLst/>
@@ -18342,8 +18298,8 @@
         </p:nvSpPr>
         <p:spPr>
           <a:xfrm>
-            <a:off x="6400800" y="6345808"/>
-            <a:ext cx="612648" cy="557910"/>
+            <a:off x="6400800" y="6289547"/>
+            <a:ext cx="612648" cy="614171"/>
           </a:xfrm>
           <a:prstGeom prst="rect">
             <a:avLst/>
@@ -18385,8 +18341,8 @@
         </p:nvSpPr>
         <p:spPr>
           <a:xfrm>
-            <a:off x="7086600" y="6345808"/>
-            <a:ext cx="612648" cy="557910"/>
+            <a:off x="7086600" y="6289547"/>
+            <a:ext cx="612648" cy="614171"/>
           </a:xfrm>
           <a:prstGeom prst="rect">
             <a:avLst/>
@@ -18428,7 +18384,7 @@
         </p:nvSpPr>
         <p:spPr>
           <a:xfrm>
-            <a:off x="8412480" y="3190494"/>
+            <a:off x="8412480" y="2852928"/>
             <a:ext cx="1097280" cy="640080"/>
           </a:xfrm>
           <a:prstGeom prst="rect">
@@ -18473,7 +18429,7 @@
         </p:nvSpPr>
         <p:spPr>
           <a:xfrm>
-            <a:off x="9784080" y="3263646"/>
+            <a:off x="9784080" y="2926080"/>
             <a:ext cx="3794760" cy="731520"/>
           </a:xfrm>
           <a:prstGeom prst="rect">
@@ -18518,7 +18474,7 @@
         </p:nvSpPr>
         <p:spPr>
           <a:xfrm>
-            <a:off x="8412480" y="4228528"/>
+            <a:off x="8412480" y="3975354"/>
             <a:ext cx="1097280" cy="640080"/>
           </a:xfrm>
           <a:prstGeom prst="rect">
@@ -18563,7 +18519,7 @@
         </p:nvSpPr>
         <p:spPr>
           <a:xfrm>
-            <a:off x="9784080" y="4301680"/>
+            <a:off x="9784080" y="4048506"/>
             <a:ext cx="3794760" cy="731520"/>
           </a:xfrm>
           <a:prstGeom prst="rect">
@@ -18608,7 +18564,7 @@
         </p:nvSpPr>
         <p:spPr>
           <a:xfrm>
-            <a:off x="8412480" y="5266563"/>
+            <a:off x="8412480" y="5097779"/>
             <a:ext cx="1097280" cy="640080"/>
           </a:xfrm>
           <a:prstGeom prst="rect">
@@ -18653,7 +18609,7 @@
         </p:nvSpPr>
         <p:spPr>
           <a:xfrm>
-            <a:off x="9784080" y="5339715"/>
+            <a:off x="9784080" y="5170931"/>
             <a:ext cx="3794760" cy="731520"/>
           </a:xfrm>
           <a:prstGeom prst="rect">
@@ -18698,7 +18654,7 @@
         </p:nvSpPr>
         <p:spPr>
           <a:xfrm>
-            <a:off x="8412480" y="6304597"/>
+            <a:off x="8412480" y="6220205"/>
             <a:ext cx="1097280" cy="640080"/>
           </a:xfrm>
           <a:prstGeom prst="rect">
@@ -18743,7 +18699,7 @@
         </p:nvSpPr>
         <p:spPr>
           <a:xfrm>
-            <a:off x="9784080" y="6377749"/>
+            <a:off x="9784080" y="6293357"/>
             <a:ext cx="3794760" cy="731520"/>
           </a:xfrm>
           <a:prstGeom prst="rect">
@@ -18820,7 +18776,7 @@
               </a:defRPr>
             </a:pPr>
             <a:r>
-              <a:t>CONCEPTUAL FUNCTION GRID / NOT A SURVEYED FLOOR PLAN</a:t>
+              <a:t>PROPOSED PROGRAM FUNCTIONS / SITE SURVEY PENDING</a:t>
             </a:r>
           </a:p>
         </p:txBody>
@@ -19114,7 +19070,7 @@
               </a:defRPr>
             </a:pPr>
             <a:r>
-              <a:t>A week with a clear rhythm.</a:t>
+              <a:t>Two preview days and five public days</a:t>
             </a:r>
           </a:p>
         </p:txBody>
@@ -19159,7 +19115,7 @@
               </a:defRPr>
             </a:pPr>
             <a:r>
-              <a:t>Two professional/preview days. Five public art days. All dates and spaces remain proposed.</a:t>
+              <a:t>The proposed week runs August 9–15, 2027. The project has no venue or date booking.</a:t>
             </a:r>
           </a:p>
         </p:txBody>
@@ -20091,7 +20047,7 @@
               </a:defRPr>
             </a:pPr>
             <a:r>
-              <a:t>The demand case to prove.</a:t>
+              <a:t>Buyer and sales targets</a:t>
             </a:r>
           </a:p>
         </p:txBody>
@@ -20136,7 +20092,7 @@
               </a:defRPr>
             </a:pPr>
             <a:r>
-              <a:t>Targets are unvalidated; visitors, qualified households and completed purchases are different measures.</a:t>
+              <a:t>Demand research must test these targets. Count visits, households and completed purchases separately.</a:t>
             </a:r>
           </a:p>
         </p:txBody>
@@ -21222,7 +21178,7 @@
               </a:defRPr>
             </a:pPr>
             <a:r>
-              <a:t>Sell art with confidence.</a:t>
+              <a:t>Seller service and sale completion</a:t>
             </a:r>
           </a:p>
         </p:txBody>
@@ -21267,7 +21223,7 @@
               </a:defRPr>
             </a:pPr>
             <a:r>
-              <a:t>Zero organizer art commission is proposed. Seller/gallery terms and external costs remain separate.</a:t>
+              <a:t>The proposal charges zero organizer art commission. Disclose seller, gallery and external costs separately.</a:t>
             </a:r>
           </a:p>
         </p:txBody>
@@ -22221,7 +22177,7 @@
               </a:defRPr>
             </a:pPr>
             <a:r>
-              <a:t>The organizer model.</a:t>
+              <a:t>Organizer revenue and costs</a:t>
             </a:r>
           </a:p>
         </p:txBody>
@@ -22266,7 +22222,7 @@
               </a:defRPr>
             </a:pPr>
             <a:r>
-              <a:t>Illustrative core proposal; no funding, fees or demand is validated.</a:t>
+              <a:t>The core scenario uses unverified funding, fee and demand assumptions.</a:t>
             </a:r>
           </a:p>
         </p:txBody>
@@ -23088,7 +23044,7 @@
               </a:defRPr>
             </a:pPr>
             <a:r>
-              <a:t>A precise host arrangement.</a:t>
+              <a:t>Proposed venue terms</a:t>
             </a:r>
           </a:p>
         </p:txBody>
@@ -23133,7 +23089,7 @@
               </a:defRPr>
             </a:pPr>
             <a:r>
-              <a:t>A discussion structure, not an agreed venue offer.</a:t>
+              <a:t>The parties need to agree the space, services and profit-share basis.</a:t>
             </a:r>
           </a:p>
         </p:txBody>
@@ -23771,7 +23727,7 @@
               </a:defRPr>
             </a:pPr>
             <a:r>
-              <a:t>distributable event profit;</a:t>
+              <a:t>distributable event profit.</a:t>
             </a:r>
           </a:p>
           <a:p>
@@ -23793,7 +23749,7 @@
               </a:defRPr>
             </a:pPr>
             <a:r>
-              <a:t>model comparison uses 15%.</a:t>
+              <a:t>Model comparison uses 15%.</a:t>
             </a:r>
           </a:p>
         </p:txBody>
